--- a/figures/Oughton_Avilash_Angirekula_2026ASSIP_Poster.pptx
+++ b/figures/Oughton_Avilash_Angirekula_2026ASSIP_Poster.pptx
@@ -5512,7 +5512,7 @@
                 </a:solidFill>
                 <a:latin typeface="Arial"/>
               </a:rPr>
-              <a:t>Avilash Angirekula¹, Dennies Bor¹, Edward J. Oughton¹</a:t>
+              <a:t>Avilash Angirekula¹, Dennies Bor¹, Alice Fox¹, Edward J. Oughton¹</a:t>
             </a:r>
             <a:endParaRPr sz="3600" baseline="30000" dirty="0">
               <a:solidFill>
@@ -6310,7 +6310,7 @@
         <p:spPr>
           <a:xfrm>
             <a:off x="22090621" y="16218476"/>
-            <a:ext cx="10418660" cy="3646932"/>
+            <a:ext cx="10418660" cy="4036821"/>
           </a:xfrm>
           <a:prstGeom prst="rect">
             <a:avLst/>
@@ -6449,6 +6449,25 @@
               <a:t>WRI (2023) Aqueduct 4.0 Water Risk Atlas.</a:t>
             </a:r>
           </a:p>
+          <a:p>
+            <a:pPr algn="l">
+              <a:lnSpc>
+                <a:spcPct val="90000"/>
+              </a:lnSpc>
+              <a:spcAft>
+                <a:spcPts val="1000"/>
+              </a:spcAft>
+            </a:pPr>
+            <a:r>
+              <a:rPr sz="2000" b="0">
+                <a:solidFill>
+                  <a:srgbClr val="333333"/>
+                </a:solidFill>
+                <a:latin typeface="Arial"/>
+              </a:rPr>
+              <a:t>Fig 1 basemap: Esri Light Gray Canvas. Tiles © Esri, DeLorme, NAVTEQ.</a:t>
+            </a:r>
+          </a:p>
         </p:txBody>
       </p:sp>
       <p:sp>
@@ -6466,7 +6485,7 @@
         <p:spPr>
           <a:xfrm>
             <a:off x="22061036" y="21636297"/>
-            <a:ext cx="10480664" cy="1215517"/>
+            <a:ext cx="10480664" cy="2175002"/>
           </a:xfrm>
           <a:prstGeom prst="rect">
             <a:avLst/>
@@ -6501,7 +6520,7 @@
                 </a:solidFill>
                 <a:latin typeface="Arial"/>
               </a:rPr>
-              <a:t>This research was made possible through the support of George Mason University's College of Science, which supports the ASSIP Program, and by the NCAR multi-hazards project.</a:t>
+              <a:t>This research was made possible through the support of George Mason University's College of Science, which supports the ASSIP Program.</a:t>
             </a:r>
             <a:endParaRPr sz="2600" i="1" dirty="0">
               <a:latin typeface="Arial" panose="020B0604020202020204" pitchFamily="34" charset="0"/>
@@ -6509,6 +6528,25 @@
               <a:cs typeface="Arial" panose="020B0604020202020204" pitchFamily="34" charset="0"/>
               <a:sym typeface="Palatino"/>
             </a:endParaRPr>
+          </a:p>
+          <a:p>
+            <a:pPr algn="l">
+              <a:lnSpc>
+                <a:spcPct val="95000"/>
+              </a:lnSpc>
+              <a:spcAft>
+                <a:spcPts val="1000"/>
+              </a:spcAft>
+            </a:pPr>
+            <a:r>
+              <a:rPr sz="2000" b="0">
+                <a:solidFill>
+                  <a:srgbClr val="333333"/>
+                </a:solidFill>
+                <a:latin typeface="Arial"/>
+              </a:rPr>
+              <a:t>DB and EO were supported by the National Science Foundation National Center for Atmospheric Research (NCAR) Innovator Supplemental Funding grant entitled “A Multi-Hazard, Multi-Infrastructure Vulnerability Assessment for the Continental United States (CONUS)”</a:t>
+            </a:r>
           </a:p>
         </p:txBody>
       </p:sp>
@@ -7795,7 +7833,7 @@
         <p:spPr>
           <a:xfrm>
             <a:off x="10965973" y="8634133"/>
-            <a:ext cx="10781748" cy="4932334"/>
+            <a:ext cx="10781748" cy="4881235"/>
           </a:xfrm>
           <a:prstGeom prst="rect">
             <a:avLst/>
@@ -7810,7 +7848,7 @@
         </p:nvSpPr>
         <p:spPr>
           <a:xfrm>
-            <a:off x="10965973" y="13639618"/>
+            <a:off x="10965973" y="13588520"/>
             <a:ext cx="10781748" cy="1298765"/>
           </a:xfrm>
           <a:prstGeom prst="rect">
@@ -7852,7 +7890,7 @@
         </p:nvSpPr>
         <p:spPr>
           <a:xfrm>
-            <a:off x="10965973" y="15029824"/>
+            <a:off x="10965973" y="14978726"/>
             <a:ext cx="10781748" cy="4965953"/>
           </a:xfrm>
           <a:prstGeom prst="rect">
@@ -7940,8 +7978,8 @@
         </p:blipFill>
         <p:spPr>
           <a:xfrm>
-            <a:off x="10965973" y="20087218"/>
-            <a:ext cx="10781748" cy="3372490"/>
+            <a:off x="10965973" y="20036120"/>
+            <a:ext cx="10781748" cy="3181543"/>
           </a:xfrm>
           <a:prstGeom prst="rect">
             <a:avLst/>
@@ -7956,8 +7994,8 @@
         </p:nvSpPr>
         <p:spPr>
           <a:xfrm>
-            <a:off x="10965973" y="23514572"/>
-            <a:ext cx="10781748" cy="688276"/>
+            <a:off x="10965973" y="23272527"/>
+            <a:ext cx="10781748" cy="993521"/>
           </a:xfrm>
           <a:prstGeom prst="rect">
             <a:avLst/>
